--- a/teaching/NS_1.pptx
+++ b/teaching/NS_1.pptx
@@ -2682,7 +2682,7 @@
       </dsp:nvSpPr>
       <dsp:spPr>
         <a:xfrm>
-          <a:off x="3813075" y="2647231"/>
+          <a:off x="3813074" y="2647231"/>
           <a:ext cx="2889450" cy="720000"/>
         </a:xfrm>
         <a:prstGeom prst="rect">
@@ -2731,7 +2731,7 @@
         </a:p>
       </dsp:txBody>
       <dsp:txXfrm>
-        <a:off x="3813075" y="2647231"/>
+        <a:off x="3813074" y="2647231"/>
         <a:ext cx="2889450" cy="720000"/>
       </dsp:txXfrm>
     </dsp:sp>
@@ -6333,7 +6333,7 @@
           <a:p>
             <a:fld id="{C59A27D3-0CC7-934B-85C6-96FBF84258AF}" type="datetimeFigureOut">
               <a:rPr lang="en-US" smtClean="0"/>
-              <a:t>1/5/25</a:t>
+              <a:t>1/8/26</a:t>
             </a:fld>
             <a:endParaRPr lang="en-US"/>
           </a:p>
@@ -7686,7 +7686,7 @@
           <a:p>
             <a:fld id="{02AC24A9-CCB6-4F8D-B8DB-C2F3692CFA5A}" type="datetimeFigureOut">
               <a:rPr lang="en-US" smtClean="0"/>
-              <a:t>1/5/25</a:t>
+              <a:t>1/8/26</a:t>
             </a:fld>
             <a:endParaRPr lang="en-US" dirty="0"/>
           </a:p>
@@ -8056,7 +8056,7 @@
           <a:p>
             <a:fld id="{02AC24A9-CCB6-4F8D-B8DB-C2F3692CFA5A}" type="datetimeFigureOut">
               <a:rPr lang="en-US" smtClean="0"/>
-              <a:t>1/5/25</a:t>
+              <a:t>1/8/26</a:t>
             </a:fld>
             <a:endParaRPr lang="en-US"/>
           </a:p>
@@ -8265,7 +8265,7 @@
           <a:p>
             <a:fld id="{02AC24A9-CCB6-4F8D-B8DB-C2F3692CFA5A}" type="datetimeFigureOut">
               <a:rPr lang="en-US" smtClean="0"/>
-              <a:t>1/5/25</a:t>
+              <a:t>1/8/26</a:t>
             </a:fld>
             <a:endParaRPr lang="en-US"/>
           </a:p>
@@ -8735,7 +8735,7 @@
           <a:p>
             <a:fld id="{02AC24A9-CCB6-4F8D-B8DB-C2F3692CFA5A}" type="datetimeFigureOut">
               <a:rPr lang="en-US" smtClean="0"/>
-              <a:t>1/5/25</a:t>
+              <a:t>1/8/26</a:t>
             </a:fld>
             <a:endParaRPr lang="en-US"/>
           </a:p>
@@ -9189,7 +9189,7 @@
           <a:p>
             <a:fld id="{02AC24A9-CCB6-4F8D-B8DB-C2F3692CFA5A}" type="datetimeFigureOut">
               <a:rPr lang="en-US" smtClean="0"/>
-              <a:t>1/5/25</a:t>
+              <a:t>1/8/26</a:t>
             </a:fld>
             <a:endParaRPr lang="en-US"/>
           </a:p>
@@ -9721,7 +9721,7 @@
           <a:p>
             <a:fld id="{02AC24A9-CCB6-4F8D-B8DB-C2F3692CFA5A}" type="datetimeFigureOut">
               <a:rPr lang="en-US" smtClean="0"/>
-              <a:t>1/5/25</a:t>
+              <a:t>1/8/26</a:t>
             </a:fld>
             <a:endParaRPr lang="en-US"/>
           </a:p>
@@ -10420,7 +10420,7 @@
           <a:p>
             <a:fld id="{02AC24A9-CCB6-4F8D-B8DB-C2F3692CFA5A}" type="datetimeFigureOut">
               <a:rPr lang="en-US" smtClean="0"/>
-              <a:t>1/5/25</a:t>
+              <a:t>1/8/26</a:t>
             </a:fld>
             <a:endParaRPr lang="en-US"/>
           </a:p>
@@ -10749,7 +10749,7 @@
           <a:p>
             <a:fld id="{02AC24A9-CCB6-4F8D-B8DB-C2F3692CFA5A}" type="datetimeFigureOut">
               <a:rPr lang="en-US" smtClean="0"/>
-              <a:t>1/5/25</a:t>
+              <a:t>1/8/26</a:t>
             </a:fld>
             <a:endParaRPr lang="en-US"/>
           </a:p>
@@ -10862,7 +10862,7 @@
           <a:p>
             <a:fld id="{02AC24A9-CCB6-4F8D-B8DB-C2F3692CFA5A}" type="datetimeFigureOut">
               <a:rPr lang="en-US" smtClean="0"/>
-              <a:t>1/5/25</a:t>
+              <a:t>1/8/26</a:t>
             </a:fld>
             <a:endParaRPr lang="en-US"/>
           </a:p>
@@ -11357,7 +11357,7 @@
           <a:p>
             <a:fld id="{02AC24A9-CCB6-4F8D-B8DB-C2F3692CFA5A}" type="datetimeFigureOut">
               <a:rPr lang="en-US" smtClean="0"/>
-              <a:t>1/5/25</a:t>
+              <a:t>1/8/26</a:t>
             </a:fld>
             <a:endParaRPr lang="en-US" dirty="0"/>
           </a:p>
@@ -11834,7 +11834,7 @@
           <a:p>
             <a:fld id="{02AC24A9-CCB6-4F8D-B8DB-C2F3692CFA5A}" type="datetimeFigureOut">
               <a:rPr lang="en-US" smtClean="0"/>
-              <a:t>1/5/25</a:t>
+              <a:t>1/8/26</a:t>
             </a:fld>
             <a:endParaRPr lang="en-US"/>
           </a:p>
@@ -12077,7 +12077,7 @@
           <a:p>
             <a:fld id="{02AC24A9-CCB6-4F8D-B8DB-C2F3692CFA5A}" type="datetimeFigureOut">
               <a:rPr lang="en-US" smtClean="0"/>
-              <a:t>1/5/25</a:t>
+              <a:t>1/8/26</a:t>
             </a:fld>
             <a:endParaRPr lang="en-US"/>
           </a:p>
@@ -12821,7 +12821,7 @@
         <p:spPr>
           <a:xfrm>
             <a:off x="475487" y="1124712"/>
-            <a:ext cx="4916783" cy="3200400"/>
+            <a:ext cx="5137037" cy="3200400"/>
           </a:xfrm>
         </p:spPr>
         <p:txBody>
@@ -12831,8 +12831,8 @@
           <a:lstStyle/>
           <a:p>
             <a:r>
-              <a:rPr lang="en-US" sz="4100" b="1" dirty="0"/>
-              <a:t>Principles of Bioengineering</a:t>
+              <a:rPr lang="en-US" sz="4000" b="1" i="1" dirty="0"/>
+              <a:t>Method and Logic in Systems Biology and Bioengineering</a:t>
             </a:r>
           </a:p>
         </p:txBody>
@@ -13380,7 +13380,7 @@
             <a:pPr lvl="1"/>
             <a:r>
               <a:rPr lang="en-US" sz="4800" dirty="0"/>
-              <a:t>Two steps to making a contribution </a:t>
+              <a:t>Two steps to making contributions </a:t>
             </a:r>
           </a:p>
         </p:txBody>
@@ -17447,7 +17447,7 @@
           <a:p>
             <a:r>
               <a:rPr lang="en-US" sz="4800" dirty="0"/>
-              <a:t>Goal</a:t>
+              <a:t>Goals</a:t>
             </a:r>
           </a:p>
         </p:txBody>
@@ -17471,15 +17471,9 @@
         <p:spPr/>
         <p:txBody>
           <a:bodyPr>
-            <a:normAutofit/>
+            <a:normAutofit lnSpcReduction="10000"/>
           </a:bodyPr>
           <a:lstStyle/>
-          <a:p>
-            <a:pPr marL="0" indent="0" algn="ctr">
-              <a:buNone/>
-            </a:pPr>
-            <a:endParaRPr lang="en-US" sz="4000" b="1" dirty="0"/>
-          </a:p>
           <a:p>
             <a:pPr marL="0" indent="0" algn="ctr">
               <a:buNone/>
@@ -17503,6 +17497,48 @@
               </a:rPr>
               <a:t> Researcher</a:t>
             </a:r>
+          </a:p>
+          <a:p>
+            <a:pPr marL="0" indent="0" algn="ctr">
+              <a:buNone/>
+            </a:pPr>
+            <a:endParaRPr lang="en-US" sz="4000" dirty="0">
+              <a:sym typeface="Wingdings" pitchFamily="2" charset="2"/>
+            </a:endParaRPr>
+          </a:p>
+          <a:p>
+            <a:pPr marL="0" indent="0" algn="ctr">
+              <a:buNone/>
+            </a:pPr>
+            <a:r>
+              <a:rPr lang="en-US" sz="4000" b="1" dirty="0"/>
+              <a:t>Interactive discussions </a:t>
+            </a:r>
+          </a:p>
+          <a:p>
+            <a:pPr marL="0" indent="0" algn="ctr">
+              <a:buNone/>
+            </a:pPr>
+            <a:r>
+              <a:rPr lang="en-US" sz="4000" dirty="0"/>
+              <a:t>Conceptual questions</a:t>
+            </a:r>
+            <a:endParaRPr lang="en-US" sz="4000" dirty="0">
+              <a:sym typeface="Wingdings" pitchFamily="2" charset="2"/>
+            </a:endParaRPr>
+          </a:p>
+          <a:p>
+            <a:pPr marL="0" indent="0" algn="ctr">
+              <a:buNone/>
+            </a:pPr>
+            <a:endParaRPr lang="en-US" sz="4000" dirty="0">
+              <a:sym typeface="Wingdings" pitchFamily="2" charset="2"/>
+            </a:endParaRPr>
+          </a:p>
+          <a:p>
+            <a:pPr marL="0" indent="0" algn="ctr">
+              <a:buNone/>
+            </a:pPr>
             <a:endParaRPr lang="en-US" sz="4000" dirty="0"/>
           </a:p>
         </p:txBody>
@@ -17599,7 +17635,7 @@
             <a:pPr lvl="0"/>
             <a:r>
               <a:rPr lang="en-US" sz="3600" dirty="0"/>
-              <a:t>10 Paper discussions -- 4 students / paper</a:t>
+              <a:t>9 Paper discussions -- 1 student / article</a:t>
             </a:r>
           </a:p>
           <a:p>
@@ -17613,18 +17649,20 @@
             <a:pPr lvl="0"/>
             <a:r>
               <a:rPr lang="en-US" sz="3600" dirty="0"/>
-              <a:t>10 Student presentations: 20 + 5 min / student  </a:t>
+              <a:t>9 Student presentations</a:t>
             </a:r>
           </a:p>
           <a:p>
             <a:pPr lvl="1"/>
             <a:r>
               <a:rPr lang="en-US" sz="3200" dirty="0"/>
-              <a:t>Written proposal: Up to 3 pages </a:t>
-            </a:r>
-          </a:p>
-          <a:p>
-            <a:endParaRPr lang="en-US" sz="3600" dirty="0"/>
+              <a:t>Present </a:t>
+            </a:r>
+            <a:r>
+              <a:rPr lang="en-US" sz="3200"/>
+              <a:t>a proposal</a:t>
+            </a:r>
+            <a:endParaRPr lang="en-US" sz="3200" dirty="0"/>
           </a:p>
         </p:txBody>
       </p:sp>
@@ -17718,11 +17756,11 @@
             <a:pPr lvl="0"/>
             <a:r>
               <a:rPr lang="en-US" sz="3600" b="1" dirty="0"/>
-              <a:t>Office Hours</a:t>
+              <a:t>Office Hours:</a:t>
             </a:r>
             <a:r>
               <a:rPr lang="en-US" sz="3600" dirty="0"/>
-              <a:t>: Tuesdays @ 10am at </a:t>
+              <a:t> Tuesdays @ noon at </a:t>
             </a:r>
             <a:r>
               <a:rPr lang="en-US" sz="3600" dirty="0" err="1"/>
@@ -17737,12 +17775,9 @@
             <a:pPr lvl="0"/>
             <a:r>
               <a:rPr lang="en-US" sz="3600" b="1" dirty="0"/>
-              <a:t>Student presentations: </a:t>
-            </a:r>
-            <a:r>
-              <a:rPr lang="en-US" sz="3600" dirty="0"/>
-              <a:t>20 +5 min / student  </a:t>
-            </a:r>
+              <a:t>Student presentations:</a:t>
+            </a:r>
+            <a:endParaRPr lang="en-US" sz="3600" dirty="0"/>
           </a:p>
           <a:p>
             <a:pPr lvl="1"/>
@@ -17861,14 +17896,14 @@
             <a:pPr lvl="0"/>
             <a:r>
               <a:rPr lang="en-US" sz="4000" dirty="0"/>
-              <a:t>Proposal &amp; presentation:              50 %</a:t>
+              <a:t>Proposal &amp; presentation:              40 %</a:t>
             </a:r>
           </a:p>
           <a:p>
             <a:pPr lvl="0"/>
             <a:r>
               <a:rPr lang="en-US" sz="4000" dirty="0"/>
-              <a:t>Paper discussion:      			   30 %</a:t>
+              <a:t>Paper discussion:      			   40 %</a:t>
             </a:r>
           </a:p>
           <a:p>
@@ -18690,4 +18725,10 @@
     </a:ext>
   </a:extLst>
 </a:theme>
+</file>
+
+<file path=docMetadata/LabelInfo.xml><?xml version="1.0" encoding="utf-8"?>
+<clbl:labelList xmlns:clbl="http://schemas.microsoft.com/office/2020/mipLabelMetadata">
+  <clbl:label id="{7893ce20-a697-4fd6-a4da-14011f6a471d}" enabled="1" method="Standard" siteId="{a8eec281-aaa3-4dae-ac9b-9a398b9215e7}" contentBits="0" removed="0"/>
+</clbl:labelList>
 </file>